--- a/outputs/NILM_scientific_poster.pptx
+++ b/outputs/NILM_scientific_poster.pptx
@@ -1275,75 +1275,54 @@
           </a:ln>
         </p:spPr>
         <p:txBody>
-          <a:bodyPr xmlns:a="http://schemas.openxmlformats.org/drawingml/2006/main"/>
+          <a:bodyPr xmlns:a="http://schemas.openxmlformats.org/drawingml/2006/main" wrap="square"/>
           <a:lstStyle xmlns:a="http://schemas.openxmlformats.org/drawingml/2006/main"/>
           <a:p xmlns:a="http://schemas.openxmlformats.org/drawingml/2006/main">
-            <a:pPr algn="l">
-              <a:defRPr sz="6450" b="1" i="0">
-                <a:solidFill>
-                  <a:srgbClr val="000000"/>
-                </a:solidFill>
-                <a:latin typeface="Arial"/>
-                <a:ea typeface="Arial"/>
-                <a:cs typeface="Arial"/>
-              </a:defRPr>
-            </a:pPr>
-            <a:r>
-              <a:rPr sz="6450" b="1" i="0">
-                <a:solidFill>
-                  <a:srgbClr val="000000"/>
-                </a:solidFill>
-                <a:latin typeface="Arial"/>
-                <a:ea typeface="Arial"/>
-                <a:cs typeface="Arial"/>
+            <a:pPr>
+              <a:spcAft>
+                <a:spcPts val="0"/>
+              </a:spcAft>
+            </a:pPr>
+            <a:r>
+              <a:rPr sz="6450" b="1">
+                <a:solidFill>
+                  <a:srgbClr val="000000"/>
+                </a:solidFill>
+                <a:latin typeface="Aptos"/>
               </a:rPr>
               <a:t>Non-Intrusive Load Monitoring</a:t>
             </a:r>
           </a:p>
           <a:p xmlns:a="http://schemas.openxmlformats.org/drawingml/2006/main">
-            <a:pPr algn="l">
-              <a:defRPr sz="6450" b="1" i="0">
-                <a:solidFill>
-                  <a:srgbClr val="000000"/>
-                </a:solidFill>
-                <a:latin typeface="Arial"/>
-                <a:ea typeface="Arial"/>
-                <a:cs typeface="Arial"/>
-              </a:defRPr>
-            </a:pPr>
-            <a:r>
-              <a:rPr sz="6450" b="1" i="0">
-                <a:solidFill>
-                  <a:srgbClr val="000000"/>
-                </a:solidFill>
-                <a:latin typeface="Arial"/>
-                <a:ea typeface="Arial"/>
-                <a:cs typeface="Arial"/>
+            <a:pPr>
+              <a:spcAft>
+                <a:spcPts val="0"/>
+              </a:spcAft>
+            </a:pPr>
+            <a:r>
+              <a:rPr sz="6450" b="1">
+                <a:solidFill>
+                  <a:srgbClr val="000000"/>
+                </a:solidFill>
+                <a:latin typeface="Aptos"/>
               </a:rPr>
               <a:t>with Harmonic Feature Fusion</a:t>
             </a:r>
           </a:p>
           <a:p xmlns:a="http://schemas.openxmlformats.org/drawingml/2006/main">
-            <a:pPr algn="l">
-              <a:defRPr sz="6450" b="1" i="0">
-                <a:solidFill>
-                  <a:srgbClr val="000000"/>
-                </a:solidFill>
-                <a:latin typeface="Arial"/>
-                <a:ea typeface="Arial"/>
-                <a:cs typeface="Arial"/>
-              </a:defRPr>
-            </a:pPr>
-            <a:r>
-              <a:rPr sz="6450" b="1" i="0">
-                <a:solidFill>
-                  <a:srgbClr val="000000"/>
-                </a:solidFill>
-                <a:latin typeface="Arial"/>
-                <a:ea typeface="Arial"/>
-                <a:cs typeface="Arial"/>
-              </a:rPr>
-              <a:t>and Live Learning</a:t>
+            <a:pPr>
+              <a:spcAft>
+                <a:spcPts val="0"/>
+              </a:spcAft>
+            </a:pPr>
+            <a:r>
+              <a:rPr sz="6450" b="1">
+                <a:solidFill>
+                  <a:srgbClr val="000000"/>
+                </a:solidFill>
+                <a:latin typeface="Aptos"/>
+              </a:rPr>
+              <a:t>and Live On-the-Go Learning</a:t>
             </a:r>
           </a:p>
         </p:txBody>
@@ -4148,28 +4127,6 @@
           </a:p>
         </p:txBody>
       </p:sp>
-      <p:pic>
-        <p:nvPicPr>
-          <p:cNvPr id="120" name=""/>
-          <p:cNvPicPr>
-            <a:picLocks xmlns:a="http://schemas.openxmlformats.org/drawingml/2006/main" noChangeAspect="1"/>
-          </p:cNvPicPr>
-          <p:nvPr/>
-        </p:nvPicPr>
-        <p:blipFill>
-          <a:blip xmlns:r="http://schemas.openxmlformats.org/officeDocument/2006/relationships" xmlns:a="http://schemas.openxmlformats.org/drawingml/2006/main" r:embed="Re4fd69a53af34f48"/>
-          <a:stretch xmlns:a="http://schemas.openxmlformats.org/drawingml/2006/main"/>
-        </p:blipFill>
-        <p:spPr>
-          <a:xfrm xmlns:a="http://schemas.openxmlformats.org/drawingml/2006/main">
-            <a:off x="21315164" y="9572625"/>
-            <a:ext cx="5947172" cy="5143500"/>
-          </a:xfrm>
-          <a:prstGeom xmlns:a="http://schemas.openxmlformats.org/drawingml/2006/main" prst="rect">
-            <a:avLst/>
-          </a:prstGeom>
-        </p:spPr>
-      </p:pic>
       <p:sp>
         <p:nvSpPr>
           <p:cNvPr id="53" name="">
@@ -4199,29 +4156,22 @@
           </a:ln>
         </p:spPr>
         <p:txBody>
-          <a:bodyPr xmlns:a="http://schemas.openxmlformats.org/drawingml/2006/main"/>
+          <a:bodyPr xmlns:a="http://schemas.openxmlformats.org/drawingml/2006/main" wrap="square"/>
           <a:lstStyle xmlns:a="http://schemas.openxmlformats.org/drawingml/2006/main"/>
           <a:p xmlns:a="http://schemas.openxmlformats.org/drawingml/2006/main">
-            <a:pPr algn="l">
-              <a:defRPr sz="1425" b="0" i="0">
-                <a:solidFill>
-                  <a:srgbClr val="000000"/>
-                </a:solidFill>
-                <a:latin typeface="Arial"/>
-                <a:ea typeface="Arial"/>
-                <a:cs typeface="Arial"/>
-              </a:defRPr>
-            </a:pPr>
-            <a:r>
-              <a:rPr sz="1425" b="0" i="0">
-                <a:solidFill>
-                  <a:srgbClr val="000000"/>
-                </a:solidFill>
-                <a:latin typeface="Arial"/>
-                <a:ea typeface="Arial"/>
-                <a:cs typeface="Arial"/>
-              </a:rPr>
-              <a:t>Figure 4: Identification confusion matrix for seven measured device families.</a:t>
+            <a:pPr>
+              <a:spcAft>
+                <a:spcPts val="0"/>
+              </a:spcAft>
+            </a:pPr>
+            <a:r>
+              <a:rPr sz="1425" b="0">
+                <a:solidFill>
+                  <a:srgbClr val="000000"/>
+                </a:solidFill>
+                <a:latin typeface="Aptos"/>
+              </a:rPr>
+              <a:t>Figure 4: Live high-load dashboard from the paper; water boiler, standing lamp and table fan are split with about 99% explained power.</a:t>
             </a:r>
           </a:p>
         </p:txBody>
@@ -4311,75 +4261,70 @@
           </a:ln>
         </p:spPr>
         <p:txBody>
-          <a:bodyPr xmlns:a="http://schemas.openxmlformats.org/drawingml/2006/main"/>
+          <a:bodyPr xmlns:a="http://schemas.openxmlformats.org/drawingml/2006/main" wrap="square"/>
           <a:lstStyle xmlns:a="http://schemas.openxmlformats.org/drawingml/2006/main"/>
           <a:p xmlns:a="http://schemas.openxmlformats.org/drawingml/2006/main">
-            <a:pPr algn="l">
-              <a:defRPr sz="2475" b="0" i="0">
-                <a:solidFill>
-                  <a:srgbClr val="000000"/>
-                </a:solidFill>
-                <a:latin typeface="Arial"/>
-                <a:ea typeface="Arial"/>
-                <a:cs typeface="Arial"/>
-              </a:defRPr>
-            </a:pPr>
-            <a:r>
-              <a:rPr sz="2475" b="0" i="0">
-                <a:solidFill>
-                  <a:srgbClr val="000000"/>
-                </a:solidFill>
-                <a:latin typeface="Arial"/>
-                <a:ea typeface="Arial"/>
-                <a:cs typeface="Arial"/>
+            <a:pPr>
+              <a:spcAft>
+                <a:spcPts val="0"/>
+              </a:spcAft>
+            </a:pPr>
+            <a:r>
+              <a:rPr sz="2475" b="0">
+                <a:solidFill>
+                  <a:srgbClr val="000000"/>
+                </a:solidFill>
+                <a:latin typeface="Aptos"/>
               </a:rPr>
               <a:t>End-to-end loop works: record, mix, train, infer, run live, detect unknowns and retrain.</a:t>
             </a:r>
           </a:p>
           <a:p xmlns:a="http://schemas.openxmlformats.org/drawingml/2006/main">
-            <a:pPr algn="l">
-              <a:defRPr sz="2475" b="0" i="0">
-                <a:solidFill>
-                  <a:srgbClr val="000000"/>
-                </a:solidFill>
-                <a:latin typeface="Arial"/>
-                <a:ea typeface="Arial"/>
-                <a:cs typeface="Arial"/>
-              </a:defRPr>
-            </a:pPr>
-            <a:r>
-              <a:rPr sz="2475" b="0" i="0">
-                <a:solidFill>
-                  <a:srgbClr val="000000"/>
-                </a:solidFill>
-                <a:latin typeface="Arial"/>
-                <a:ea typeface="Arial"/>
-                <a:cs typeface="Arial"/>
+            <a:pPr>
+              <a:spcAft>
+                <a:spcPts val="0"/>
+              </a:spcAft>
+            </a:pPr>
+            <a:r>
+              <a:rPr sz="2475" b="0">
+                <a:solidFill>
+                  <a:srgbClr val="000000"/>
+                </a:solidFill>
+                <a:latin typeface="Aptos"/>
+              </a:rPr>
+              <a:t>Live validation detected an unknown residual after 8 s, retrained in 26 s, and re-recognised the taught device with 0.95 confidence.</a:t>
+            </a:r>
+          </a:p>
+          <a:p xmlns:a="http://schemas.openxmlformats.org/drawingml/2006/main">
+            <a:pPr>
+              <a:spcAft>
+                <a:spcPts val="0"/>
+              </a:spcAft>
+            </a:pPr>
+            <a:r>
+              <a:rPr sz="2475" b="0">
+                <a:solidFill>
+                  <a:srgbClr val="000000"/>
+                </a:solidFill>
+                <a:latin typeface="Aptos"/>
+              </a:rPr>
+              <a:t>The high-load test split about 1.44 kW into water boiler, standing lamp and table fan with about 99% explained power.</a:t>
+            </a:r>
+          </a:p>
+          <a:p xmlns:a="http://schemas.openxmlformats.org/drawingml/2006/main">
+            <a:pPr>
+              <a:spcAft>
+                <a:spcPts val="0"/>
+              </a:spcAft>
+            </a:pPr>
+            <a:r>
+              <a:rPr sz="2475" b="0">
+                <a:solidFill>
+                  <a:srgbClr val="000000"/>
+                </a:solidFill>
+                <a:latin typeface="Aptos"/>
               </a:rPr>
               <a:t>Event features improved the measured-data mix model compared with the earlier frozen bundle.</a:t>
-            </a:r>
-          </a:p>
-          <a:p xmlns:a="http://schemas.openxmlformats.org/drawingml/2006/main">
-            <a:pPr algn="l">
-              <a:defRPr sz="2475" b="0" i="0">
-                <a:solidFill>
-                  <a:srgbClr val="000000"/>
-                </a:solidFill>
-                <a:latin typeface="Arial"/>
-                <a:ea typeface="Arial"/>
-                <a:cs typeface="Arial"/>
-              </a:defRPr>
-            </a:pPr>
-            <a:r>
-              <a:rPr sz="2475" b="0" i="0">
-                <a:solidFill>
-                  <a:srgbClr val="000000"/>
-                </a:solidFill>
-                <a:latin typeface="Arial"/>
-                <a:ea typeface="Arial"/>
-                <a:cs typeface="Arial"/>
-              </a:rPr>
-              <a:t>The live monitor combines RF window predictions with edge claims, so fast switching information is not lost inside 10 s windows.</a:t>
             </a:r>
           </a:p>
         </p:txBody>
@@ -4469,119 +4414,84 @@
           </a:ln>
         </p:spPr>
         <p:txBody>
-          <a:bodyPr xmlns:a="http://schemas.openxmlformats.org/drawingml/2006/main"/>
+          <a:bodyPr xmlns:a="http://schemas.openxmlformats.org/drawingml/2006/main" wrap="square"/>
           <a:lstStyle xmlns:a="http://schemas.openxmlformats.org/drawingml/2006/main"/>
           <a:p xmlns:a="http://schemas.openxmlformats.org/drawingml/2006/main">
-            <a:pPr algn="l">
-              <a:defRPr sz="2475" b="0" i="0">
-                <a:solidFill>
-                  <a:srgbClr val="000000"/>
-                </a:solidFill>
-                <a:latin typeface="Arial"/>
-                <a:ea typeface="Arial"/>
-                <a:cs typeface="Arial"/>
-              </a:defRPr>
-            </a:pPr>
-            <a:r>
-              <a:rPr sz="2475" b="0" i="0">
-                <a:solidFill>
-                  <a:srgbClr val="000000"/>
-                </a:solidFill>
-                <a:latin typeface="Arial"/>
-                <a:ea typeface="Arial"/>
-                <a:cs typeface="Arial"/>
+            <a:pPr>
+              <a:spcAft>
+                <a:spcPts val="0"/>
+              </a:spcAft>
+            </a:pPr>
+            <a:r>
+              <a:rPr sz="2475" b="0">
+                <a:solidFill>
+                  <a:srgbClr val="000000"/>
+                </a:solidFill>
+                <a:latin typeface="Aptos"/>
               </a:rPr>
               <a:t>Record real PV during actual generation; current PV recordings contain almost no generated power.</a:t>
             </a:r>
           </a:p>
           <a:p xmlns:a="http://schemas.openxmlformats.org/drawingml/2006/main">
-            <a:pPr algn="l">
-              <a:defRPr sz="2475" b="0" i="0">
-                <a:solidFill>
-                  <a:srgbClr val="000000"/>
-                </a:solidFill>
-                <a:latin typeface="Arial"/>
-                <a:ea typeface="Arial"/>
-                <a:cs typeface="Arial"/>
-              </a:defRPr>
-            </a:pPr>
-            <a:r>
-              <a:rPr sz="2475" b="0" i="0">
-                <a:solidFill>
-                  <a:srgbClr val="000000"/>
-                </a:solidFill>
-                <a:latin typeface="Arial"/>
-                <a:ea typeface="Arial"/>
-                <a:cs typeface="Arial"/>
+            <a:pPr>
+              <a:spcAft>
+                <a:spcPts val="0"/>
+              </a:spcAft>
+            </a:pPr>
+            <a:r>
+              <a:rPr sz="2475" b="0">
+                <a:solidFill>
+                  <a:srgbClr val="000000"/>
+                </a:solidFill>
+                <a:latin typeface="Aptos"/>
               </a:rPr>
               <a:t>Measure several sessions per device and more variants of small fans, then use grouped evaluation by session.</a:t>
             </a:r>
           </a:p>
           <a:p xmlns:a="http://schemas.openxmlformats.org/drawingml/2006/main">
-            <a:pPr algn="l">
-              <a:defRPr sz="2475" b="0" i="0">
-                <a:solidFill>
-                  <a:srgbClr val="000000"/>
-                </a:solidFill>
-                <a:latin typeface="Arial"/>
-                <a:ea typeface="Arial"/>
-                <a:cs typeface="Arial"/>
-              </a:defRPr>
-            </a:pPr>
-            <a:r>
-              <a:rPr sz="2475" b="0" i="0">
-                <a:solidFill>
-                  <a:srgbClr val="000000"/>
-                </a:solidFill>
-                <a:latin typeface="Arial"/>
-                <a:ea typeface="Arial"/>
-                <a:cs typeface="Arial"/>
+            <a:pPr>
+              <a:spcAft>
+                <a:spcPts val="0"/>
+              </a:spcAft>
+            </a:pPr>
+            <a:r>
+              <a:rPr sz="2475" b="0">
+                <a:solidFill>
+                  <a:srgbClr val="000000"/>
+                </a:solidFill>
+                <a:latin typeface="Aptos"/>
               </a:rPr>
               <a:t>Run feature ablations: common vs harmonic, 14 vs 17 aggregate features, and with/without edge features.</a:t>
             </a:r>
           </a:p>
           <a:p xmlns:a="http://schemas.openxmlformats.org/drawingml/2006/main">
-            <a:pPr algn="l">
-              <a:defRPr sz="2475" b="0" i="0">
-                <a:solidFill>
-                  <a:srgbClr val="000000"/>
-                </a:solidFill>
-                <a:latin typeface="Arial"/>
-                <a:ea typeface="Arial"/>
-                <a:cs typeface="Arial"/>
-              </a:defRPr>
-            </a:pPr>
-            <a:r>
-              <a:rPr sz="2475" b="0" i="0">
-                <a:solidFill>
-                  <a:srgbClr val="000000"/>
-                </a:solidFill>
-                <a:latin typeface="Arial"/>
-                <a:ea typeface="Arial"/>
-                <a:cs typeface="Arial"/>
+            <a:pPr>
+              <a:spcAft>
+                <a:spcPts val="0"/>
+              </a:spcAft>
+            </a:pPr>
+            <a:r>
+              <a:rPr sz="2475" b="0">
+                <a:solidFill>
+                  <a:srgbClr val="000000"/>
+                </a:solidFill>
+                <a:latin typeface="Aptos"/>
               </a:rPr>
               <a:t>Use sequence models (CNN/LSTM or seq2point) for long appliance cycles such as washing machines.</a:t>
             </a:r>
           </a:p>
           <a:p xmlns:a="http://schemas.openxmlformats.org/drawingml/2006/main">
-            <a:pPr algn="l">
-              <a:defRPr sz="2475" b="0" i="0">
-                <a:solidFill>
-                  <a:srgbClr val="000000"/>
-                </a:solidFill>
-                <a:latin typeface="Arial"/>
-                <a:ea typeface="Arial"/>
-                <a:cs typeface="Arial"/>
-              </a:defRPr>
-            </a:pPr>
-            <a:r>
-              <a:rPr sz="2475" b="0" i="0">
-                <a:solidFill>
-                  <a:srgbClr val="000000"/>
-                </a:solidFill>
-                <a:latin typeface="Arial"/>
-                <a:ea typeface="Arial"/>
-                <a:cs typeface="Arial"/>
+            <a:pPr>
+              <a:spcAft>
+                <a:spcPts val="0"/>
+              </a:spcAft>
+            </a:pPr>
+            <a:r>
+              <a:rPr sz="2475" b="0">
+                <a:solidFill>
+                  <a:srgbClr val="000000"/>
+                </a:solidFill>
+                <a:latin typeface="Aptos"/>
               </a:rPr>
               <a:t>Validate on true simultaneous multi-device recordings, not only semi-synthetic measured mixes.</a:t>
             </a:r>
@@ -4695,29 +4605,22 @@
           </a:ln>
         </p:spPr>
         <p:txBody>
-          <a:bodyPr xmlns:a="http://schemas.openxmlformats.org/drawingml/2006/main"/>
+          <a:bodyPr xmlns:a="http://schemas.openxmlformats.org/drawingml/2006/main" wrap="square"/>
           <a:lstStyle xmlns:a="http://schemas.openxmlformats.org/drawingml/2006/main"/>
           <a:p xmlns:a="http://schemas.openxmlformats.org/drawingml/2006/main">
-            <a:pPr algn="l">
-              <a:defRPr sz="2700" b="0" i="0">
-                <a:solidFill>
-                  <a:srgbClr val="000000"/>
-                </a:solidFill>
-                <a:latin typeface="Arial"/>
-                <a:ea typeface="Arial"/>
-                <a:cs typeface="Arial"/>
-              </a:defRPr>
-            </a:pPr>
-            <a:r>
-              <a:rPr sz="2700" b="0" i="0">
-                <a:solidFill>
-                  <a:srgbClr val="000000"/>
-                </a:solidFill>
-                <a:latin typeface="Arial"/>
-                <a:ea typeface="Arial"/>
-                <a:cs typeface="Arial"/>
-              </a:rPr>
-              <a:t>A 5 Hz industrial power meter is enough for a useful NILM laboratory system when its processed channels are fused deliberately. The current implementation is not just an offline classifier: it is a deployable workflow with measured data ingestion, RF presence/power inference, edge-aware live events, residual honesty and guided learning for unknown loads.</a:t>
+            <a:pPr>
+              <a:spcAft>
+                <a:spcPts val="0"/>
+              </a:spcAft>
+            </a:pPr>
+            <a:r>
+              <a:rPr sz="2700" b="0">
+                <a:solidFill>
+                  <a:srgbClr val="000000"/>
+                </a:solidFill>
+                <a:latin typeface="Aptos"/>
+              </a:rPr>
+              <a:t>A 5 Hz industrial power meter is enough for a useful NILM laboratory system when its processed channels are fused deliberately. The current implementation is not just an offline classifier: it is a deployable workflow with measured data ingestion, RF presence/power inference, edge-aware live events, residual honesty, guided learning for unknown loads, and hot-reload retraining during operation.</a:t>
             </a:r>
           </a:p>
         </p:txBody>
@@ -5214,29 +5117,22 @@
           </a:ln>
         </p:spPr>
         <p:txBody>
-          <a:bodyPr xmlns:a="http://schemas.openxmlformats.org/drawingml/2006/main"/>
+          <a:bodyPr xmlns:a="http://schemas.openxmlformats.org/drawingml/2006/main" wrap="square"/>
           <a:lstStyle xmlns:a="http://schemas.openxmlformats.org/drawingml/2006/main"/>
           <a:p xmlns:a="http://schemas.openxmlformats.org/drawingml/2006/main">
-            <a:pPr algn="l">
-              <a:defRPr sz="1725" b="0" i="0">
-                <a:solidFill>
-                  <a:srgbClr val="000000"/>
-                </a:solidFill>
-                <a:latin typeface="Arial"/>
-                <a:ea typeface="Arial"/>
-                <a:cs typeface="Arial"/>
-              </a:defRPr>
-            </a:pPr>
-            <a:r>
-              <a:rPr sz="1725" b="0" i="0">
-                <a:solidFill>
-                  <a:srgbClr val="000000"/>
-                </a:solidFill>
-                <a:latin typeface="Arial"/>
-                <a:ea typeface="Arial"/>
-                <a:cs typeface="Arial"/>
-              </a:rPr>
-              <a:t>Hart (1992) Nonintrusive appliance load monitoring; Sahoo et al. (2020) feature fusion for NILM; Siemens SENTRON PAC4200 system manual; project docs 01-09; tracked model metrics in Scripts/MS2_Pipeline/output. Figures are generated from repository artifacts and live-system screenshots.</a:t>
+            <a:pPr>
+              <a:spcAft>
+                <a:spcPts val="0"/>
+              </a:spcAft>
+            </a:pPr>
+            <a:r>
+              <a:rPr sz="1725" b="0">
+                <a:solidFill>
+                  <a:srgbClr val="000000"/>
+                </a:solidFill>
+                <a:latin typeface="Aptos"/>
+              </a:rPr>
+              <a:t>Hart (1992) Nonintrusive appliance load monitoring; Reddy et al. (2020) and Papageorgiou et al. (2022) on feature fusion and harmonic NILM; Siemens SENTRON PAC4200 system manual; project docs 01-09; tracked model metrics in Scripts/MS2_Pipeline/output. Figures are generated from repository artifacts and live-system screenshots.</a:t>
             </a:r>
           </a:p>
         </p:txBody>
@@ -5297,6 +5193,31 @@
           </a:p>
         </p:txBody>
       </p:sp>
+      <p:pic xmlns:a="http://schemas.openxmlformats.org/drawingml/2006/main" xmlns:r="http://schemas.openxmlformats.org/officeDocument/2006/relationships">
+        <p:nvPicPr>
+          <p:cNvPr id="135" name="Live test high-load dashboard screenshot" descr="live_test3.jpeg"/>
+          <p:cNvPicPr>
+            <a:picLocks noChangeAspect="1"/>
+          </p:cNvPicPr>
+          <p:nvPr/>
+        </p:nvPicPr>
+        <p:blipFill>
+          <a:blip r:embed="rId6"/>
+          <a:srcRect t="8300" b="8300"/>
+          <a:stretch>
+            <a:fillRect/>
+          </a:stretch>
+        </p:blipFill>
+        <p:spPr>
+          <a:xfrm>
+            <a:off x="19907250" y="9239250"/>
+            <a:ext cx="8763000" cy="4953000"/>
+          </a:xfrm>
+          <a:prstGeom prst="rect">
+            <a:avLst/>
+          </a:prstGeom>
+        </p:spPr>
+      </p:pic>
     </p:spTree>
     <p:extLst>
       <p:ext uri="{BB962C8B-B14F-4D97-AF65-F5344CB8AC3E}">
